--- a/docs/gsd-lite-concept.pptx
+++ b/docs/gsd-lite-concept.pptx
@@ -5782,7 +5782,7 @@
                 <a:ea typeface="Meiryo" pitchFamily="34" charset="-122"/>
                 <a:cs typeface="Meiryo" pitchFamily="34" charset="-120"/>
               </a:rPr>
-              <a:t>AUQ の選択肢に答えるだけで仕様が確定。要件コミット → ブランチ作成 → ループのデタッチ起動まで面倒を見てくれる</a:t>
+              <a:t>AUQ の選択肢に答えるだけで仕様が確定。最後の質問に「起動する」と答えれば、ブランチ作成からループの起動まで完了（コマンド入力は不要）</a:t>
             </a:r>
             <a:endParaRPr lang="en-US" sz="1250" dirty="0"/>
           </a:p>
@@ -5959,6 +5959,87 @@
         </p:nvSpPr>
         <p:spPr>
           <a:xfrm>
+            <a:off x="548640" y="5897880"/>
+            <a:ext cx="5943600" cy="685800"/>
+          </a:xfrm>
+          <a:prstGeom prst="roundRect">
+            <a:avLst>
+              <a:gd name="adj" fmla="val 13333"/>
+            </a:avLst>
+          </a:prstGeom>
+          <a:solidFill>
+            <a:srgbClr val="E6F7F2"/>
+          </a:solidFill>
+          <a:ln/>
+        </p:spPr>
+      </p:sp>
+      <p:sp>
+        <p:nvSpPr>
+          <p:cNvPr id="18" name="Text 16"/>
+          <p:cNvSpPr txBox="1"/>
+          <p:nvPr/>
+        </p:nvSpPr>
+        <p:spPr>
+          <a:xfrm>
+            <a:off x="777240" y="5897880"/>
+            <a:ext cx="5486400" cy="685800"/>
+          </a:xfrm>
+          <a:prstGeom prst="rect">
+            <a:avLst/>
+          </a:prstGeom>
+          <a:noFill/>
+          <a:ln/>
+        </p:spPr>
+        <p:txBody>
+          <a:bodyPr wrap="square" lIns="0" tIns="0" rIns="0" bIns="0" rtlCol="0" anchor="ctr"/>
+          <a:lstStyle/>
+          <a:p>
+            <a:pPr indent="0" marL="0">
+              <a:lnSpc>
+                <a:spcPct val="110000"/>
+              </a:lnSpc>
+              <a:buNone/>
+            </a:pPr>
+            <a:r>
+              <a:rPr lang="en-US" sz="1150" b="1" dirty="0">
+                <a:solidFill>
+                  <a:srgbClr val="0A7D66"/>
+                </a:solidFill>
+                <a:latin typeface="Meiryo" pitchFamily="34" charset="0"/>
+                <a:ea typeface="Meiryo" pitchFamily="34" charset="-122"/>
+                <a:cs typeface="Meiryo" pitchFamily="34" charset="-120"/>
+              </a:rPr>
+              <a:t>手動で起動したいとき: </a:t>
+            </a:r>
+            <a:pPr indent="0" marL="0">
+              <a:lnSpc>
+                <a:spcPct val="110000"/>
+              </a:lnSpc>
+              <a:buNone/>
+            </a:pPr>
+            <a:r>
+              <a:rPr lang="en-US" sz="1150" dirty="0">
+                <a:solidFill>
+                  <a:srgbClr val="5A6478"/>
+                </a:solidFill>
+                <a:latin typeface="Meiryo" pitchFamily="34" charset="0"/>
+                <a:ea typeface="Meiryo" pitchFamily="34" charset="-122"/>
+                <a:cs typeface="Meiryo" pitchFamily="34" charset="-120"/>
+              </a:rPr>
+              <a:t>ターミナルで gsd-lite-loop.sh を実行、または対話セッションで「gsd-lite のループを起動して」と頼むだけでもよい</a:t>
+            </a:r>
+            <a:endParaRPr lang="en-US" sz="1150" dirty="0"/>
+          </a:p>
+        </p:txBody>
+      </p:sp>
+      <p:sp>
+        <p:nvSpPr>
+          <p:cNvPr id="19" name="Shape 17"/>
+          <p:cNvSpPr/>
+          <p:nvPr/>
+        </p:nvSpPr>
+        <p:spPr>
+          <a:xfrm>
             <a:off x="6858000" y="1325880"/>
             <a:ext cx="4800600" cy="2926080"/>
           </a:xfrm>
@@ -5975,7 +6056,7 @@
       </p:sp>
       <p:sp>
         <p:nvSpPr>
-          <p:cNvPr id="18" name="Text 16"/>
+          <p:cNvPr id="20" name="Text 18"/>
           <p:cNvSpPr txBox="1"/>
           <p:nvPr/>
         </p:nvSpPr>
@@ -6014,7 +6095,7 @@
       </p:sp>
       <p:sp>
         <p:nvSpPr>
-          <p:cNvPr id="19" name="Shape 17"/>
+          <p:cNvPr id="21" name="Shape 19"/>
           <p:cNvSpPr/>
           <p:nvPr/>
         </p:nvSpPr>
@@ -6034,7 +6115,7 @@
       </p:sp>
       <p:pic>
         <p:nvPicPr>
-          <p:cNvPr id="20" name="Image 0" descr="preencoded.png">    </p:cNvPr>
+          <p:cNvPr id="22" name="Image 0" descr="preencoded.png">    </p:cNvPr>
           <p:cNvPicPr>
             <a:picLocks noChangeAspect="1"/>
           </p:cNvPicPr>
@@ -6058,7 +6139,7 @@
       </p:pic>
       <p:sp>
         <p:nvSpPr>
-          <p:cNvPr id="21" name="Text 18"/>
+          <p:cNvPr id="23" name="Text 20"/>
           <p:cNvSpPr txBox="1"/>
           <p:nvPr/>
         </p:nvSpPr>
@@ -6097,7 +6178,7 @@
       </p:sp>
       <p:sp>
         <p:nvSpPr>
-          <p:cNvPr id="22" name="Text 19"/>
+          <p:cNvPr id="24" name="Text 21"/>
           <p:cNvSpPr txBox="1"/>
           <p:nvPr/>
         </p:nvSpPr>
@@ -6136,7 +6217,7 @@
       </p:sp>
       <p:sp>
         <p:nvSpPr>
-          <p:cNvPr id="23" name="Shape 20"/>
+          <p:cNvPr id="25" name="Shape 22"/>
           <p:cNvSpPr/>
           <p:nvPr/>
         </p:nvSpPr>
@@ -6156,7 +6237,7 @@
       </p:sp>
       <p:pic>
         <p:nvPicPr>
-          <p:cNvPr id="24" name="Image 1" descr="preencoded.png">    </p:cNvPr>
+          <p:cNvPr id="26" name="Image 1" descr="preencoded.png">    </p:cNvPr>
           <p:cNvPicPr>
             <a:picLocks noChangeAspect="1"/>
           </p:cNvPicPr>
@@ -6180,7 +6261,7 @@
       </p:pic>
       <p:sp>
         <p:nvSpPr>
-          <p:cNvPr id="25" name="Text 21"/>
+          <p:cNvPr id="27" name="Text 23"/>
           <p:cNvSpPr txBox="1"/>
           <p:nvPr/>
         </p:nvSpPr>
@@ -6219,7 +6300,7 @@
       </p:sp>
       <p:sp>
         <p:nvSpPr>
-          <p:cNvPr id="26" name="Text 22"/>
+          <p:cNvPr id="28" name="Text 24"/>
           <p:cNvSpPr txBox="1"/>
           <p:nvPr/>
         </p:nvSpPr>
@@ -6258,7 +6339,7 @@
       </p:sp>
       <p:sp>
         <p:nvSpPr>
-          <p:cNvPr id="27" name="Shape 23"/>
+          <p:cNvPr id="29" name="Shape 25"/>
           <p:cNvSpPr/>
           <p:nvPr/>
         </p:nvSpPr>
@@ -6278,7 +6359,7 @@
       </p:sp>
       <p:pic>
         <p:nvPicPr>
-          <p:cNvPr id="28" name="Image 2" descr="preencoded.png">    </p:cNvPr>
+          <p:cNvPr id="30" name="Image 2" descr="preencoded.png">    </p:cNvPr>
           <p:cNvPicPr>
             <a:picLocks noChangeAspect="1"/>
           </p:cNvPicPr>
@@ -6302,7 +6383,7 @@
       </p:pic>
       <p:sp>
         <p:nvSpPr>
-          <p:cNvPr id="29" name="Text 24"/>
+          <p:cNvPr id="31" name="Text 26"/>
           <p:cNvSpPr txBox="1"/>
           <p:nvPr/>
         </p:nvSpPr>
@@ -6341,7 +6422,7 @@
       </p:sp>
       <p:sp>
         <p:nvSpPr>
-          <p:cNvPr id="30" name="Text 25"/>
+          <p:cNvPr id="32" name="Text 27"/>
           <p:cNvSpPr txBox="1"/>
           <p:nvPr/>
         </p:nvSpPr>
@@ -6380,7 +6461,7 @@
       </p:sp>
       <p:sp>
         <p:nvSpPr>
-          <p:cNvPr id="31" name="Shape 26"/>
+          <p:cNvPr id="33" name="Shape 28"/>
           <p:cNvSpPr/>
           <p:nvPr/>
         </p:nvSpPr>
@@ -6407,7 +6488,7 @@
       </p:sp>
       <p:sp>
         <p:nvSpPr>
-          <p:cNvPr id="32" name="Text 27"/>
+          <p:cNvPr id="34" name="Text 29"/>
           <p:cNvSpPr txBox="1"/>
           <p:nvPr/>
         </p:nvSpPr>
@@ -6446,7 +6527,7 @@
       </p:sp>
       <p:sp>
         <p:nvSpPr>
-          <p:cNvPr id="33" name="Text 28"/>
+          <p:cNvPr id="35" name="Text 30"/>
           <p:cNvSpPr txBox="1"/>
           <p:nvPr/>
         </p:nvSpPr>

--- a/docs/gsd-lite-concept.pptx
+++ b/docs/gsd-lite-concept.pptx
@@ -3643,7 +3643,7 @@
                 <a:ea typeface="Meiryo" pitchFamily="34" charset="-122"/>
                 <a:cs typeface="Meiryo" pitchFamily="34" charset="-120"/>
               </a:rPr>
-              <a:t>合格で自動マージ</a:t>
+              <a:t>合格なら仕上げへ</a:t>
             </a:r>
             <a:endParaRPr lang="en-US" sz="950" dirty="0"/>
           </a:p>
@@ -3802,7 +3802,7 @@
                 <a:ea typeface="Meiryo" pitchFamily="34" charset="-122"/>
                 <a:cs typeface="Meiryo" pitchFamily="34" charset="-120"/>
               </a:rPr>
-              <a:t>main にマージ済み</a:t>
+              <a:t>ローカル: 自動マージ</a:t>
             </a:r>
             <a:endParaRPr lang="en-US" sz="950" dirty="0"/>
           </a:p>
@@ -3822,7 +3822,7 @@
                 <a:ea typeface="Meiryo" pitchFamily="34" charset="-122"/>
                 <a:cs typeface="Meiryo" pitchFamily="34" charset="-120"/>
               </a:rPr>
-              <a:t>ブランチは残す</a:t>
+              <a:t>リモート: MR/PR 作成</a:t>
             </a:r>
             <a:endParaRPr lang="en-US" sz="950" dirty="0"/>
           </a:p>
@@ -4299,7 +4299,7 @@
                 <a:ea typeface="Meiryo" pitchFamily="34" charset="-122"/>
                 <a:cs typeface="Meiryo" pitchFamily="34" charset="-120"/>
               </a:rPr>
-              <a:t>discuss 完了時に gsd-lite/&lt;slug&gt; を作成。verify 合格でベースブランチへ --no-ff マージ（衝突時は BLOCKED）</a:t>
+              <a:t>discuss 完了時に gsd-lite/&lt;slug&gt; を作成。合格後はローカルのみなら --no-ff で自動マージ、リモートがあれば push + MR/PR 作成</a:t>
             </a:r>
             <a:endParaRPr lang="en-US" sz="1200" dirty="0"/>
           </a:p>
@@ -5945,7 +5945,7 @@
                 <a:ea typeface="Meiryo" pitchFamily="34" charset="-122"/>
                 <a:cs typeface="Meiryo" pitchFamily="34" charset="-120"/>
               </a:rPr>
-              <a:t>research → plan → impl ×N → verify → 自動マージが無人で進む。朝には main にマージ済みか、BLOCKED.md に質問が置いてある</a:t>
+              <a:t>research → plan → impl ×N → verify → 仕上げまで無人で進む。朝には main にマージ済み（リモートありなら MR/PR 作成済み）か、BLOCKED.md に質問が置いてある</a:t>
             </a:r>
             <a:endParaRPr lang="en-US" sz="1250" dirty="0"/>
           </a:p>
@@ -6561,7 +6561,7 @@
                 <a:ea typeface="Meiryo" pitchFamily="34" charset="-122"/>
                 <a:cs typeface="Meiryo" pitchFamily="34" charset="-120"/>
               </a:rPr>
-              <a:t>0  DONE — マージ済み。成果を確認するだけ</a:t>
+              <a:t>0  DONE — マージ / MR 作成済み。確認するだけ</a:t>
             </a:r>
             <a:endParaRPr lang="en-US" sz="1150" dirty="0"/>
           </a:p>

--- a/docs/gsd-lite-concept.pptx
+++ b/docs/gsd-lite-concept.pptx
@@ -4271,8 +4271,8 @@
         </p:nvSpPr>
         <p:spPr>
           <a:xfrm>
-            <a:off x="7296912" y="5394960"/>
-            <a:ext cx="4297680" cy="777240"/>
+            <a:off x="7296912" y="5349240"/>
+            <a:ext cx="4297680" cy="868680"/>
           </a:xfrm>
           <a:prstGeom prst="rect">
             <a:avLst/>
@@ -4291,7 +4291,7 @@
               <a:buNone/>
             </a:pPr>
             <a:r>
-              <a:rPr lang="en-US" sz="1200" dirty="0">
+              <a:rPr lang="en-US" sz="1100" dirty="0">
                 <a:solidFill>
                   <a:srgbClr val="5A6478"/>
                 </a:solidFill>
@@ -4299,9 +4299,9 @@
                 <a:ea typeface="Meiryo" pitchFamily="34" charset="-122"/>
                 <a:cs typeface="Meiryo" pitchFamily="34" charset="-120"/>
               </a:rPr>
-              <a:t>discuss 完了時に gsd-lite/&lt;slug&gt; を作成。合格後はローカルのみなら --no-ff で自動マージ、リモートがあれば push + MR/PR 作成</a:t>
-            </a:r>
-            <a:endParaRPr lang="en-US" sz="1200" dirty="0"/>
+              <a:t>discuss 完了時に gsd-lite/&lt;slug&gt; を作成。合格後: ローカルは --no-ff 自動マージ / リモートは push + MR・PR 作成（gh / glab、glab 不在時は GitLab の push オプションで代替）</a:t>
+            </a:r>
+            <a:endParaRPr lang="en-US" sz="1100" dirty="0"/>
           </a:p>
         </p:txBody>
       </p:sp>
